--- a/source/guide-deck-viewer.pptx
+++ b/source/guide-deck-viewer.pptx
@@ -12167,7 +12167,7 @@
                   <a:srgbClr val="555B6B"/>
                 </a:solidFill>
               </a:rPr>
-              <a:t>Pressure-sensitive ink, up to 10 UZH colours.</a:t>
+              <a:t>Pressure-sensitive ink. Tap again for the colours.</a:t>
             </a:r>
           </a:p>
         </p:txBody>
@@ -12550,7 +12550,7 @@
                   <a:srgbClr val="555B6B"/>
                 </a:solidFill>
               </a:rPr>
-              <a:t>Transparent marks in the six UZH accent colours.</a:t>
+              <a:t>Transparent marks. Tap again for the colours.</a:t>
             </a:r>
           </a:p>
         </p:txBody>
